--- a/114得新生命.pptx
+++ b/114得新生命.pptx
@@ -175,7 +175,7 @@
           <a:lstStyle/>
           <a:p>
             <a:r>
-              <a:rPr lang="en-US" altLang="zh-TW" smtClean="0"/>
+              <a:rPr lang="en-US" altLang="zh-TW"/>
               <a:t>Click to edit Master title style</a:t>
             </a:r>
             <a:endParaRPr lang="zh-TW" altLang="en-US"/>
@@ -294,7 +294,7 @@
           </a:lstStyle>
           <a:p>
             <a:r>
-              <a:rPr lang="en-US" altLang="zh-TW" smtClean="0"/>
+              <a:rPr lang="en-US" altLang="zh-TW"/>
               <a:t>Click to edit Master subtitle style</a:t>
             </a:r>
             <a:endParaRPr lang="zh-TW" altLang="en-US"/>
@@ -319,7 +319,7 @@
             <a:fld id="{86B5546F-C09B-4E63-ABC5-F7C86A7E8D66}" type="datetimeFigureOut">
               <a:rPr lang="en-US" smtClean="0"/>
               <a:pPr/>
-              <a:t>7/15/2020</a:t>
+              <a:t>6/22/2024</a:t>
             </a:fld>
             <a:endParaRPr lang="en-US"/>
           </a:p>
@@ -414,7 +414,7 @@
           <a:lstStyle/>
           <a:p>
             <a:r>
-              <a:rPr lang="en-US" altLang="zh-TW" smtClean="0"/>
+              <a:rPr lang="en-US" altLang="zh-TW"/>
               <a:t>Click to edit Master title style</a:t>
             </a:r>
             <a:endParaRPr lang="zh-TW" altLang="en-US"/>
@@ -438,35 +438,35 @@
           <a:p>
             <a:pPr lvl="0"/>
             <a:r>
-              <a:rPr lang="en-US" altLang="zh-TW" smtClean="0"/>
+              <a:rPr lang="en-US" altLang="zh-TW"/>
               <a:t>Edit Master text styles</a:t>
             </a:r>
           </a:p>
           <a:p>
             <a:pPr lvl="1"/>
             <a:r>
-              <a:rPr lang="en-US" altLang="zh-TW" smtClean="0"/>
+              <a:rPr lang="en-US" altLang="zh-TW"/>
               <a:t>Second level</a:t>
             </a:r>
           </a:p>
           <a:p>
             <a:pPr lvl="2"/>
             <a:r>
-              <a:rPr lang="en-US" altLang="zh-TW" smtClean="0"/>
+              <a:rPr lang="en-US" altLang="zh-TW"/>
               <a:t>Third level</a:t>
             </a:r>
           </a:p>
           <a:p>
             <a:pPr lvl="3"/>
             <a:r>
-              <a:rPr lang="en-US" altLang="zh-TW" smtClean="0"/>
+              <a:rPr lang="en-US" altLang="zh-TW"/>
               <a:t>Fourth level</a:t>
             </a:r>
           </a:p>
           <a:p>
             <a:pPr lvl="4"/>
             <a:r>
-              <a:rPr lang="en-US" altLang="zh-TW" smtClean="0"/>
+              <a:rPr lang="en-US" altLang="zh-TW"/>
               <a:t>Fifth level</a:t>
             </a:r>
             <a:endParaRPr lang="zh-TW" altLang="en-US"/>
@@ -491,7 +491,7 @@
             <a:fld id="{86B5546F-C09B-4E63-ABC5-F7C86A7E8D66}" type="datetimeFigureOut">
               <a:rPr lang="en-US" smtClean="0"/>
               <a:pPr/>
-              <a:t>7/15/2020</a:t>
+              <a:t>6/22/2024</a:t>
             </a:fld>
             <a:endParaRPr lang="en-US"/>
           </a:p>
@@ -591,7 +591,7 @@
           <a:lstStyle/>
           <a:p>
             <a:r>
-              <a:rPr lang="en-US" altLang="zh-TW" smtClean="0"/>
+              <a:rPr lang="en-US" altLang="zh-TW"/>
               <a:t>Click to edit Master title style</a:t>
             </a:r>
             <a:endParaRPr lang="zh-TW" altLang="en-US"/>
@@ -620,35 +620,35 @@
           <a:p>
             <a:pPr lvl="0"/>
             <a:r>
-              <a:rPr lang="en-US" altLang="zh-TW" smtClean="0"/>
+              <a:rPr lang="en-US" altLang="zh-TW"/>
               <a:t>Edit Master text styles</a:t>
             </a:r>
           </a:p>
           <a:p>
             <a:pPr lvl="1"/>
             <a:r>
-              <a:rPr lang="en-US" altLang="zh-TW" smtClean="0"/>
+              <a:rPr lang="en-US" altLang="zh-TW"/>
               <a:t>Second level</a:t>
             </a:r>
           </a:p>
           <a:p>
             <a:pPr lvl="2"/>
             <a:r>
-              <a:rPr lang="en-US" altLang="zh-TW" smtClean="0"/>
+              <a:rPr lang="en-US" altLang="zh-TW"/>
               <a:t>Third level</a:t>
             </a:r>
           </a:p>
           <a:p>
             <a:pPr lvl="3"/>
             <a:r>
-              <a:rPr lang="en-US" altLang="zh-TW" smtClean="0"/>
+              <a:rPr lang="en-US" altLang="zh-TW"/>
               <a:t>Fourth level</a:t>
             </a:r>
           </a:p>
           <a:p>
             <a:pPr lvl="4"/>
             <a:r>
-              <a:rPr lang="en-US" altLang="zh-TW" smtClean="0"/>
+              <a:rPr lang="en-US" altLang="zh-TW"/>
               <a:t>Fifth level</a:t>
             </a:r>
             <a:endParaRPr lang="zh-TW" altLang="en-US"/>
@@ -673,7 +673,7 @@
             <a:fld id="{86B5546F-C09B-4E63-ABC5-F7C86A7E8D66}" type="datetimeFigureOut">
               <a:rPr lang="en-US" smtClean="0"/>
               <a:pPr/>
-              <a:t>7/15/2020</a:t>
+              <a:t>6/22/2024</a:t>
             </a:fld>
             <a:endParaRPr lang="en-US"/>
           </a:p>
@@ -768,7 +768,7 @@
           <a:lstStyle/>
           <a:p>
             <a:r>
-              <a:rPr lang="en-US" altLang="zh-TW" smtClean="0"/>
+              <a:rPr lang="en-US" altLang="zh-TW"/>
               <a:t>Click to edit Master title style</a:t>
             </a:r>
             <a:endParaRPr lang="zh-TW" altLang="en-US"/>
@@ -792,35 +792,35 @@
           <a:p>
             <a:pPr lvl="0"/>
             <a:r>
-              <a:rPr lang="en-US" altLang="zh-TW" smtClean="0"/>
+              <a:rPr lang="en-US" altLang="zh-TW"/>
               <a:t>Edit Master text styles</a:t>
             </a:r>
           </a:p>
           <a:p>
             <a:pPr lvl="1"/>
             <a:r>
-              <a:rPr lang="en-US" altLang="zh-TW" smtClean="0"/>
+              <a:rPr lang="en-US" altLang="zh-TW"/>
               <a:t>Second level</a:t>
             </a:r>
           </a:p>
           <a:p>
             <a:pPr lvl="2"/>
             <a:r>
-              <a:rPr lang="en-US" altLang="zh-TW" smtClean="0"/>
+              <a:rPr lang="en-US" altLang="zh-TW"/>
               <a:t>Third level</a:t>
             </a:r>
           </a:p>
           <a:p>
             <a:pPr lvl="3"/>
             <a:r>
-              <a:rPr lang="en-US" altLang="zh-TW" smtClean="0"/>
+              <a:rPr lang="en-US" altLang="zh-TW"/>
               <a:t>Fourth level</a:t>
             </a:r>
           </a:p>
           <a:p>
             <a:pPr lvl="4"/>
             <a:r>
-              <a:rPr lang="en-US" altLang="zh-TW" smtClean="0"/>
+              <a:rPr lang="en-US" altLang="zh-TW"/>
               <a:t>Fifth level</a:t>
             </a:r>
             <a:endParaRPr lang="zh-TW" altLang="en-US"/>
@@ -845,7 +845,7 @@
             <a:fld id="{86B5546F-C09B-4E63-ABC5-F7C86A7E8D66}" type="datetimeFigureOut">
               <a:rPr lang="en-US" smtClean="0"/>
               <a:pPr/>
-              <a:t>7/15/2020</a:t>
+              <a:t>6/22/2024</a:t>
             </a:fld>
             <a:endParaRPr lang="en-US"/>
           </a:p>
@@ -949,7 +949,7 @@
           </a:lstStyle>
           <a:p>
             <a:r>
-              <a:rPr lang="en-US" altLang="zh-TW" smtClean="0"/>
+              <a:rPr lang="en-US" altLang="zh-TW"/>
               <a:t>Click to edit Master title style</a:t>
             </a:r>
             <a:endParaRPr lang="zh-TW" altLang="en-US"/>
@@ -1069,7 +1069,7 @@
           <a:p>
             <a:pPr lvl="0"/>
             <a:r>
-              <a:rPr lang="en-US" altLang="zh-TW" smtClean="0"/>
+              <a:rPr lang="en-US" altLang="zh-TW"/>
               <a:t>Edit Master text styles</a:t>
             </a:r>
           </a:p>
@@ -1093,7 +1093,7 @@
             <a:fld id="{86B5546F-C09B-4E63-ABC5-F7C86A7E8D66}" type="datetimeFigureOut">
               <a:rPr lang="en-US" smtClean="0"/>
               <a:pPr/>
-              <a:t>7/15/2020</a:t>
+              <a:t>6/22/2024</a:t>
             </a:fld>
             <a:endParaRPr lang="en-US"/>
           </a:p>
@@ -1188,7 +1188,7 @@
           <a:lstStyle/>
           <a:p>
             <a:r>
-              <a:rPr lang="en-US" altLang="zh-TW" smtClean="0"/>
+              <a:rPr lang="en-US" altLang="zh-TW"/>
               <a:t>Click to edit Master title style</a:t>
             </a:r>
             <a:endParaRPr lang="zh-TW" altLang="en-US"/>
@@ -1245,35 +1245,35 @@
           <a:p>
             <a:pPr lvl="0"/>
             <a:r>
-              <a:rPr lang="en-US" altLang="zh-TW" smtClean="0"/>
+              <a:rPr lang="en-US" altLang="zh-TW"/>
               <a:t>Edit Master text styles</a:t>
             </a:r>
           </a:p>
           <a:p>
             <a:pPr lvl="1"/>
             <a:r>
-              <a:rPr lang="en-US" altLang="zh-TW" smtClean="0"/>
+              <a:rPr lang="en-US" altLang="zh-TW"/>
               <a:t>Second level</a:t>
             </a:r>
           </a:p>
           <a:p>
             <a:pPr lvl="2"/>
             <a:r>
-              <a:rPr lang="en-US" altLang="zh-TW" smtClean="0"/>
+              <a:rPr lang="en-US" altLang="zh-TW"/>
               <a:t>Third level</a:t>
             </a:r>
           </a:p>
           <a:p>
             <a:pPr lvl="3"/>
             <a:r>
-              <a:rPr lang="en-US" altLang="zh-TW" smtClean="0"/>
+              <a:rPr lang="en-US" altLang="zh-TW"/>
               <a:t>Fourth level</a:t>
             </a:r>
           </a:p>
           <a:p>
             <a:pPr lvl="4"/>
             <a:r>
-              <a:rPr lang="en-US" altLang="zh-TW" smtClean="0"/>
+              <a:rPr lang="en-US" altLang="zh-TW"/>
               <a:t>Fifth level</a:t>
             </a:r>
             <a:endParaRPr lang="zh-TW" altLang="en-US"/>
@@ -1330,35 +1330,35 @@
           <a:p>
             <a:pPr lvl="0"/>
             <a:r>
-              <a:rPr lang="en-US" altLang="zh-TW" smtClean="0"/>
+              <a:rPr lang="en-US" altLang="zh-TW"/>
               <a:t>Edit Master text styles</a:t>
             </a:r>
           </a:p>
           <a:p>
             <a:pPr lvl="1"/>
             <a:r>
-              <a:rPr lang="en-US" altLang="zh-TW" smtClean="0"/>
+              <a:rPr lang="en-US" altLang="zh-TW"/>
               <a:t>Second level</a:t>
             </a:r>
           </a:p>
           <a:p>
             <a:pPr lvl="2"/>
             <a:r>
-              <a:rPr lang="en-US" altLang="zh-TW" smtClean="0"/>
+              <a:rPr lang="en-US" altLang="zh-TW"/>
               <a:t>Third level</a:t>
             </a:r>
           </a:p>
           <a:p>
             <a:pPr lvl="3"/>
             <a:r>
-              <a:rPr lang="en-US" altLang="zh-TW" smtClean="0"/>
+              <a:rPr lang="en-US" altLang="zh-TW"/>
               <a:t>Fourth level</a:t>
             </a:r>
           </a:p>
           <a:p>
             <a:pPr lvl="4"/>
             <a:r>
-              <a:rPr lang="en-US" altLang="zh-TW" smtClean="0"/>
+              <a:rPr lang="en-US" altLang="zh-TW"/>
               <a:t>Fifth level</a:t>
             </a:r>
             <a:endParaRPr lang="zh-TW" altLang="en-US"/>
@@ -1383,7 +1383,7 @@
             <a:fld id="{86B5546F-C09B-4E63-ABC5-F7C86A7E8D66}" type="datetimeFigureOut">
               <a:rPr lang="en-US" smtClean="0"/>
               <a:pPr/>
-              <a:t>7/15/2020</a:t>
+              <a:t>6/22/2024</a:t>
             </a:fld>
             <a:endParaRPr lang="en-US"/>
           </a:p>
@@ -1482,7 +1482,7 @@
           </a:lstStyle>
           <a:p>
             <a:r>
-              <a:rPr lang="en-US" altLang="zh-TW" smtClean="0"/>
+              <a:rPr lang="en-US" altLang="zh-TW"/>
               <a:t>Click to edit Master title style</a:t>
             </a:r>
             <a:endParaRPr lang="zh-TW" altLang="en-US"/>
@@ -1548,7 +1548,7 @@
           <a:p>
             <a:pPr lvl="0"/>
             <a:r>
-              <a:rPr lang="en-US" altLang="zh-TW" smtClean="0"/>
+              <a:rPr lang="en-US" altLang="zh-TW"/>
               <a:t>Edit Master text styles</a:t>
             </a:r>
           </a:p>
@@ -1604,35 +1604,35 @@
           <a:p>
             <a:pPr lvl="0"/>
             <a:r>
-              <a:rPr lang="en-US" altLang="zh-TW" smtClean="0"/>
+              <a:rPr lang="en-US" altLang="zh-TW"/>
               <a:t>Edit Master text styles</a:t>
             </a:r>
           </a:p>
           <a:p>
             <a:pPr lvl="1"/>
             <a:r>
-              <a:rPr lang="en-US" altLang="zh-TW" smtClean="0"/>
+              <a:rPr lang="en-US" altLang="zh-TW"/>
               <a:t>Second level</a:t>
             </a:r>
           </a:p>
           <a:p>
             <a:pPr lvl="2"/>
             <a:r>
-              <a:rPr lang="en-US" altLang="zh-TW" smtClean="0"/>
+              <a:rPr lang="en-US" altLang="zh-TW"/>
               <a:t>Third level</a:t>
             </a:r>
           </a:p>
           <a:p>
             <a:pPr lvl="3"/>
             <a:r>
-              <a:rPr lang="en-US" altLang="zh-TW" smtClean="0"/>
+              <a:rPr lang="en-US" altLang="zh-TW"/>
               <a:t>Fourth level</a:t>
             </a:r>
           </a:p>
           <a:p>
             <a:pPr lvl="4"/>
             <a:r>
-              <a:rPr lang="en-US" altLang="zh-TW" smtClean="0"/>
+              <a:rPr lang="en-US" altLang="zh-TW"/>
               <a:t>Fifth level</a:t>
             </a:r>
             <a:endParaRPr lang="zh-TW" altLang="en-US"/>
@@ -1698,7 +1698,7 @@
           <a:p>
             <a:pPr lvl="0"/>
             <a:r>
-              <a:rPr lang="en-US" altLang="zh-TW" smtClean="0"/>
+              <a:rPr lang="en-US" altLang="zh-TW"/>
               <a:t>Edit Master text styles</a:t>
             </a:r>
           </a:p>
@@ -1754,35 +1754,35 @@
           <a:p>
             <a:pPr lvl="0"/>
             <a:r>
-              <a:rPr lang="en-US" altLang="zh-TW" smtClean="0"/>
+              <a:rPr lang="en-US" altLang="zh-TW"/>
               <a:t>Edit Master text styles</a:t>
             </a:r>
           </a:p>
           <a:p>
             <a:pPr lvl="1"/>
             <a:r>
-              <a:rPr lang="en-US" altLang="zh-TW" smtClean="0"/>
+              <a:rPr lang="en-US" altLang="zh-TW"/>
               <a:t>Second level</a:t>
             </a:r>
           </a:p>
           <a:p>
             <a:pPr lvl="2"/>
             <a:r>
-              <a:rPr lang="en-US" altLang="zh-TW" smtClean="0"/>
+              <a:rPr lang="en-US" altLang="zh-TW"/>
               <a:t>Third level</a:t>
             </a:r>
           </a:p>
           <a:p>
             <a:pPr lvl="3"/>
             <a:r>
-              <a:rPr lang="en-US" altLang="zh-TW" smtClean="0"/>
+              <a:rPr lang="en-US" altLang="zh-TW"/>
               <a:t>Fourth level</a:t>
             </a:r>
           </a:p>
           <a:p>
             <a:pPr lvl="4"/>
             <a:r>
-              <a:rPr lang="en-US" altLang="zh-TW" smtClean="0"/>
+              <a:rPr lang="en-US" altLang="zh-TW"/>
               <a:t>Fifth level</a:t>
             </a:r>
             <a:endParaRPr lang="zh-TW" altLang="en-US"/>
@@ -1807,7 +1807,7 @@
             <a:fld id="{86B5546F-C09B-4E63-ABC5-F7C86A7E8D66}" type="datetimeFigureOut">
               <a:rPr lang="en-US" smtClean="0"/>
               <a:pPr/>
-              <a:t>7/15/2020</a:t>
+              <a:t>6/22/2024</a:t>
             </a:fld>
             <a:endParaRPr lang="en-US"/>
           </a:p>
@@ -1902,7 +1902,7 @@
           <a:lstStyle/>
           <a:p>
             <a:r>
-              <a:rPr lang="en-US" altLang="zh-TW" smtClean="0"/>
+              <a:rPr lang="en-US" altLang="zh-TW"/>
               <a:t>Click to edit Master title style</a:t>
             </a:r>
             <a:endParaRPr lang="zh-TW" altLang="en-US"/>
@@ -1927,7 +1927,7 @@
             <a:fld id="{86B5546F-C09B-4E63-ABC5-F7C86A7E8D66}" type="datetimeFigureOut">
               <a:rPr lang="en-US" smtClean="0"/>
               <a:pPr/>
-              <a:t>7/15/2020</a:t>
+              <a:t>6/22/2024</a:t>
             </a:fld>
             <a:endParaRPr lang="en-US"/>
           </a:p>
@@ -2024,7 +2024,7 @@
             <a:fld id="{86B5546F-C09B-4E63-ABC5-F7C86A7E8D66}" type="datetimeFigureOut">
               <a:rPr lang="en-US" smtClean="0"/>
               <a:pPr/>
-              <a:t>7/15/2020</a:t>
+              <a:t>6/22/2024</a:t>
             </a:fld>
             <a:endParaRPr lang="en-US"/>
           </a:p>
@@ -2128,7 +2128,7 @@
           </a:lstStyle>
           <a:p>
             <a:r>
-              <a:rPr lang="en-US" altLang="zh-TW" smtClean="0"/>
+              <a:rPr lang="en-US" altLang="zh-TW"/>
               <a:t>Click to edit Master title style</a:t>
             </a:r>
             <a:endParaRPr lang="zh-TW" altLang="en-US"/>
@@ -2185,35 +2185,35 @@
           <a:p>
             <a:pPr lvl="0"/>
             <a:r>
-              <a:rPr lang="en-US" altLang="zh-TW" smtClean="0"/>
+              <a:rPr lang="en-US" altLang="zh-TW"/>
               <a:t>Edit Master text styles</a:t>
             </a:r>
           </a:p>
           <a:p>
             <a:pPr lvl="1"/>
             <a:r>
-              <a:rPr lang="en-US" altLang="zh-TW" smtClean="0"/>
+              <a:rPr lang="en-US" altLang="zh-TW"/>
               <a:t>Second level</a:t>
             </a:r>
           </a:p>
           <a:p>
             <a:pPr lvl="2"/>
             <a:r>
-              <a:rPr lang="en-US" altLang="zh-TW" smtClean="0"/>
+              <a:rPr lang="en-US" altLang="zh-TW"/>
               <a:t>Third level</a:t>
             </a:r>
           </a:p>
           <a:p>
             <a:pPr lvl="3"/>
             <a:r>
-              <a:rPr lang="en-US" altLang="zh-TW" smtClean="0"/>
+              <a:rPr lang="en-US" altLang="zh-TW"/>
               <a:t>Fourth level</a:t>
             </a:r>
           </a:p>
           <a:p>
             <a:pPr lvl="4"/>
             <a:r>
-              <a:rPr lang="en-US" altLang="zh-TW" smtClean="0"/>
+              <a:rPr lang="en-US" altLang="zh-TW"/>
               <a:t>Fifth level</a:t>
             </a:r>
             <a:endParaRPr lang="zh-TW" altLang="en-US"/>
@@ -2279,7 +2279,7 @@
           <a:p>
             <a:pPr lvl="0"/>
             <a:r>
-              <a:rPr lang="en-US" altLang="zh-TW" smtClean="0"/>
+              <a:rPr lang="en-US" altLang="zh-TW"/>
               <a:t>Edit Master text styles</a:t>
             </a:r>
           </a:p>
@@ -2303,7 +2303,7 @@
             <a:fld id="{86B5546F-C09B-4E63-ABC5-F7C86A7E8D66}" type="datetimeFigureOut">
               <a:rPr lang="en-US" smtClean="0"/>
               <a:pPr/>
-              <a:t>7/15/2020</a:t>
+              <a:t>6/22/2024</a:t>
             </a:fld>
             <a:endParaRPr lang="en-US"/>
           </a:p>
@@ -2407,7 +2407,7 @@
           </a:lstStyle>
           <a:p>
             <a:r>
-              <a:rPr lang="en-US" altLang="zh-TW" smtClean="0"/>
+              <a:rPr lang="en-US" altLang="zh-TW"/>
               <a:t>Click to edit Master title style</a:t>
             </a:r>
             <a:endParaRPr lang="zh-TW" altLang="en-US"/>
@@ -2472,7 +2472,7 @@
           </a:lstStyle>
           <a:p>
             <a:r>
-              <a:rPr lang="en-US" altLang="zh-TW" smtClean="0"/>
+              <a:rPr lang="en-US" altLang="zh-TW"/>
               <a:t>Click icon to add picture</a:t>
             </a:r>
             <a:endParaRPr lang="zh-TW" altLang="en-US"/>
@@ -2538,7 +2538,7 @@
           <a:p>
             <a:pPr lvl="0"/>
             <a:r>
-              <a:rPr lang="en-US" altLang="zh-TW" smtClean="0"/>
+              <a:rPr lang="en-US" altLang="zh-TW"/>
               <a:t>Edit Master text styles</a:t>
             </a:r>
           </a:p>
@@ -2562,7 +2562,7 @@
             <a:fld id="{86B5546F-C09B-4E63-ABC5-F7C86A7E8D66}" type="datetimeFigureOut">
               <a:rPr lang="en-US" smtClean="0"/>
               <a:pPr/>
-              <a:t>7/15/2020</a:t>
+              <a:t>6/22/2024</a:t>
             </a:fld>
             <a:endParaRPr lang="en-US"/>
           </a:p>
@@ -2677,10 +2677,9 @@
           <a:lstStyle/>
           <a:p>
             <a:r>
-              <a:rPr lang="zh-TW" altLang="en-US" smtClean="0"/>
+              <a:rPr lang="zh-TW" altLang="en-US"/>
               <a:t>按一下以編輯母片標題樣式</a:t>
             </a:r>
-            <a:endParaRPr lang="zh-TW" altLang="en-US"/>
           </a:p>
         </p:txBody>
       </p:sp>
@@ -2711,38 +2710,37 @@
           <a:p>
             <a:pPr lvl="0"/>
             <a:r>
-              <a:rPr lang="zh-TW" altLang="en-US" smtClean="0"/>
+              <a:rPr lang="zh-TW" altLang="en-US"/>
               <a:t>按一下以編輯母片文字樣式</a:t>
             </a:r>
           </a:p>
           <a:p>
             <a:pPr lvl="1"/>
             <a:r>
-              <a:rPr lang="zh-TW" altLang="en-US" smtClean="0"/>
+              <a:rPr lang="zh-TW" altLang="en-US"/>
               <a:t>第二層</a:t>
             </a:r>
           </a:p>
           <a:p>
             <a:pPr lvl="2"/>
             <a:r>
-              <a:rPr lang="zh-TW" altLang="en-US" smtClean="0"/>
+              <a:rPr lang="zh-TW" altLang="en-US"/>
               <a:t>第三層</a:t>
             </a:r>
           </a:p>
           <a:p>
             <a:pPr lvl="3"/>
             <a:r>
-              <a:rPr lang="zh-TW" altLang="en-US" smtClean="0"/>
+              <a:rPr lang="zh-TW" altLang="en-US"/>
               <a:t>第四層</a:t>
             </a:r>
           </a:p>
           <a:p>
             <a:pPr lvl="4"/>
             <a:r>
-              <a:rPr lang="zh-TW" altLang="en-US" smtClean="0"/>
+              <a:rPr lang="zh-TW" altLang="en-US"/>
               <a:t>第五層</a:t>
             </a:r>
-            <a:endParaRPr lang="zh-TW" altLang="en-US"/>
           </a:p>
         </p:txBody>
       </p:sp>
@@ -2782,7 +2780,7 @@
             <a:fld id="{86B5546F-C09B-4E63-ABC5-F7C86A7E8D66}" type="datetimeFigureOut">
               <a:rPr lang="en-US" smtClean="0"/>
               <a:pPr/>
-              <a:t>7/15/2020</a:t>
+              <a:t>6/22/2024</a:t>
             </a:fld>
             <a:endParaRPr lang="en-US"/>
           </a:p>
@@ -3227,7 +3225,7 @@
           <a:lstStyle/>
           <a:p>
             <a:r>
-              <a:rPr lang="zh-CN" altLang="en-US" b="1" dirty="0" smtClean="0">
+              <a:rPr lang="zh-CN" altLang="en-US" b="1" dirty="0">
                 <a:solidFill>
                   <a:srgbClr val="000066"/>
                 </a:solidFill>
@@ -3237,7 +3235,7 @@
               <a:t>西</a:t>
             </a:r>
             <a:r>
-              <a:rPr lang="en-US" altLang="zh-CN" b="1" dirty="0" smtClean="0">
+              <a:rPr lang="en-US" altLang="zh-CN" b="1" dirty="0">
                 <a:solidFill>
                   <a:srgbClr val="000066"/>
                 </a:solidFill>
@@ -3257,7 +3255,7 @@
               <a:t>：</a:t>
             </a:r>
             <a:r>
-              <a:rPr lang="en-US" altLang="zh-CN" b="1" dirty="0" smtClean="0">
+              <a:rPr lang="en-US" altLang="zh-CN" b="1" dirty="0">
                 <a:solidFill>
                   <a:srgbClr val="000066"/>
                 </a:solidFill>
@@ -3301,13 +3299,6 @@
   <p:clrMapOvr>
     <a:masterClrMapping/>
   </p:clrMapOvr>
-  <p:timing>
-    <p:tnLst>
-      <p:par>
-        <p:cTn id="1" dur="indefinite" restart="never" nodeType="tmRoot"/>
-      </p:par>
-    </p:tnLst>
-  </p:timing>
 </p:sld>
 </file>
 
@@ -3351,24 +3342,14 @@
           <a:lstStyle/>
           <a:p>
             <a:r>
-              <a:rPr lang="zh-TW" altLang="en-US" sz="6400" b="1" dirty="0" smtClean="0">
+              <a:rPr lang="zh-TW" altLang="en-US" sz="6400" b="1" dirty="0">
                 <a:solidFill>
                   <a:srgbClr val="660033"/>
                 </a:solidFill>
                 <a:latin typeface="微軟正黑體" pitchFamily="34" charset="-120"/>
                 <a:ea typeface="微軟正黑體" pitchFamily="34" charset="-120"/>
               </a:rPr>
-              <a:t>在</a:t>
-            </a:r>
-            <a:r>
-              <a:rPr lang="zh-TW" altLang="en-US" sz="6400" b="1" dirty="0">
-                <a:solidFill>
-                  <a:srgbClr val="660033"/>
-                </a:solidFill>
-                <a:latin typeface="微軟正黑體" pitchFamily="34" charset="-120"/>
-                <a:ea typeface="微軟正黑體" pitchFamily="34" charset="-120"/>
-              </a:rPr>
-              <a:t>此並不分希利尼人、猶太人，受割禮的、未受割禮的，化外人，西古提人，為奴的、自主的，惟有基督是包括一切，又住在各人之內。</a:t>
+              <a:t>在此並不分希利尼人、猶太人，受割禮的、未受割禮的，化外人，西古提人，為奴的、自主的，惟有基督是包括一切，又住在各人之內。</a:t>
             </a:r>
             <a:r>
               <a:rPr lang="en-US" altLang="zh-TW" sz="6400" b="1" dirty="0">
@@ -3443,17 +3424,7 @@
                 <a:latin typeface="微軟正黑體" pitchFamily="34" charset="-120"/>
                 <a:ea typeface="微軟正黑體" pitchFamily="34" charset="-120"/>
               </a:rPr>
-              <a:t>所</a:t>
-            </a:r>
-            <a:r>
-              <a:rPr lang="zh-TW" altLang="en-US" sz="6400" dirty="0">
-                <a:solidFill>
-                  <a:srgbClr val="660033"/>
-                </a:solidFill>
-                <a:latin typeface="微軟正黑體" pitchFamily="34" charset="-120"/>
-                <a:ea typeface="微軟正黑體" pitchFamily="34" charset="-120"/>
-              </a:rPr>
-              <a:t>以，你們既是神的選民，聖潔蒙愛的人，就要存憐憫、恩慈、謙虛、溫柔、忍耐的心。</a:t>
+              <a:t>所以，你們既是神的選民，聖潔蒙愛的人，就要存憐憫、恩慈、謙虛、溫柔、忍耐的心。</a:t>
             </a:r>
             <a:r>
               <a:rPr lang="en-US" altLang="zh-TW" sz="6400" dirty="0">
@@ -3528,17 +3499,7 @@
                 <a:latin typeface="微軟正黑體" pitchFamily="34" charset="-120"/>
                 <a:ea typeface="微軟正黑體" pitchFamily="34" charset="-120"/>
               </a:rPr>
-              <a:t>倘</a:t>
-            </a:r>
-            <a:r>
-              <a:rPr lang="zh-TW" altLang="en-US" sz="6400" b="1" dirty="0">
-                <a:solidFill>
-                  <a:srgbClr val="660033"/>
-                </a:solidFill>
-                <a:latin typeface="微軟正黑體" pitchFamily="34" charset="-120"/>
-                <a:ea typeface="微軟正黑體" pitchFamily="34" charset="-120"/>
-              </a:rPr>
-              <a:t>若這人與那人有嫌隙，總要彼此包容，彼此饒恕；主怎樣饒恕了你們，你們也要怎樣饒恕人。</a:t>
+              <a:t>倘若這人與那人有嫌隙，總要彼此包容，彼此饒恕；主怎樣饒恕了你們，你們也要怎樣饒恕人。</a:t>
             </a:r>
             <a:r>
               <a:rPr lang="en-US" altLang="zh-TW" sz="6400" b="1" dirty="0">
@@ -3606,24 +3567,14 @@
           <a:lstStyle/>
           <a:p>
             <a:r>
-              <a:rPr lang="zh-TW" altLang="en-US" sz="6400" dirty="0" smtClean="0">
+              <a:rPr lang="zh-TW" altLang="en-US" sz="6400" dirty="0">
                 <a:solidFill>
                   <a:srgbClr val="660033"/>
                 </a:solidFill>
                 <a:latin typeface="微軟正黑體" pitchFamily="34" charset="-120"/>
                 <a:ea typeface="微軟正黑體" pitchFamily="34" charset="-120"/>
               </a:rPr>
-              <a:t>在</a:t>
-            </a:r>
-            <a:r>
-              <a:rPr lang="zh-TW" altLang="en-US" sz="6400" dirty="0">
-                <a:solidFill>
-                  <a:srgbClr val="660033"/>
-                </a:solidFill>
-                <a:latin typeface="微軟正黑體" pitchFamily="34" charset="-120"/>
-                <a:ea typeface="微軟正黑體" pitchFamily="34" charset="-120"/>
-              </a:rPr>
-              <a:t>這一切之外，要存著愛心，愛心就是聯絡全德的。</a:t>
+              <a:t>在這一切之外，要存著愛心，愛心就是聯絡全德的。</a:t>
             </a:r>
             <a:r>
               <a:rPr lang="en-US" altLang="zh-TW" sz="6400" dirty="0">
@@ -3638,24 +3589,14 @@
           </a:p>
           <a:p>
             <a:r>
-              <a:rPr lang="zh-TW" altLang="en-US" sz="6400" b="1" dirty="0" smtClean="0">
+              <a:rPr lang="zh-TW" altLang="en-US" sz="6400" b="1" dirty="0">
                 <a:solidFill>
                   <a:srgbClr val="660033"/>
                 </a:solidFill>
                 <a:latin typeface="微軟正黑體" pitchFamily="34" charset="-120"/>
                 <a:ea typeface="微軟正黑體" pitchFamily="34" charset="-120"/>
               </a:rPr>
-              <a:t>又</a:t>
-            </a:r>
-            <a:r>
-              <a:rPr lang="zh-TW" altLang="en-US" sz="6400" b="1" dirty="0">
-                <a:solidFill>
-                  <a:srgbClr val="660033"/>
-                </a:solidFill>
-                <a:latin typeface="微軟正黑體" pitchFamily="34" charset="-120"/>
-                <a:ea typeface="微軟正黑體" pitchFamily="34" charset="-120"/>
-              </a:rPr>
-              <a:t>要叫基督的平安在你們心裡作主；你們也為此蒙召，歸為一體；且要存感謝的心。</a:t>
+              <a:t>又要叫基督的平安在你們心裡作主；你們也為此蒙召，歸為一體；且要存感謝的心。</a:t>
             </a:r>
             <a:r>
               <a:rPr lang="en-US" altLang="zh-TW" sz="6400" b="1" dirty="0">
@@ -3730,23 +3671,12 @@
                 <a:latin typeface="微軟正黑體" pitchFamily="34" charset="-120"/>
                 <a:ea typeface="微軟正黑體" pitchFamily="34" charset="-120"/>
               </a:rPr>
-              <a:t>當</a:t>
-            </a:r>
-            <a:r>
-              <a:rPr lang="zh-TW" altLang="en-US" sz="6400" dirty="0">
-                <a:solidFill>
-                  <a:srgbClr val="660033"/>
-                </a:solidFill>
-                <a:latin typeface="微軟正黑體" pitchFamily="34" charset="-120"/>
-                <a:ea typeface="微軟正黑體" pitchFamily="34" charset="-120"/>
-              </a:rPr>
-              <a:t>用各樣的智慧，把基督的道理豐豐富富的存在心裡，用詩章、頌詞、靈歌，彼此教導，互相勸戒，心被恩感，歌頌神。</a:t>
+              <a:t>當用各樣的智慧，把基督的道理豐豐富富的存在心裡，用詩章、頌詞、靈歌，彼此教導，互相勸戒，心被恩感，歌頌神。</a:t>
             </a:r>
             <a:r>
               <a:rPr lang="en-US" altLang="zh-TW" sz="6600" dirty="0"/>
               <a:t> </a:t>
             </a:r>
-            <a:endParaRPr lang="en-US" altLang="zh-TW" sz="6600" dirty="0"/>
           </a:p>
         </p:txBody>
       </p:sp>
@@ -3810,17 +3740,7 @@
                 <a:latin typeface="微軟正黑體" pitchFamily="34" charset="-120"/>
                 <a:ea typeface="微軟正黑體" pitchFamily="34" charset="-120"/>
               </a:rPr>
-              <a:t>無</a:t>
-            </a:r>
-            <a:r>
-              <a:rPr lang="zh-TW" altLang="en-US" sz="6400" b="1" dirty="0">
-                <a:solidFill>
-                  <a:srgbClr val="660033"/>
-                </a:solidFill>
-                <a:latin typeface="微軟正黑體" pitchFamily="34" charset="-120"/>
-                <a:ea typeface="微軟正黑體" pitchFamily="34" charset="-120"/>
-              </a:rPr>
-              <a:t>論做什麼，或說話或行事，都要奉主耶穌的名，藉著他感謝父神。</a:t>
+              <a:t>無論做什麼，或說話或行事，都要奉主耶穌的名，藉著他感謝父神。</a:t>
             </a:r>
             <a:r>
               <a:rPr lang="en-US" altLang="zh-TW" sz="6400" b="1" dirty="0">
@@ -3895,17 +3815,7 @@
                 <a:latin typeface="微軟正黑體" pitchFamily="34" charset="-120"/>
                 <a:ea typeface="微軟正黑體" pitchFamily="34" charset="-120"/>
               </a:rPr>
-              <a:t>你</a:t>
-            </a:r>
-            <a:r>
-              <a:rPr lang="zh-TW" altLang="en-US" sz="6400" dirty="0">
-                <a:solidFill>
-                  <a:srgbClr val="660033"/>
-                </a:solidFill>
-                <a:latin typeface="微軟正黑體" pitchFamily="34" charset="-120"/>
-                <a:ea typeface="微軟正黑體" pitchFamily="34" charset="-120"/>
-              </a:rPr>
-              <a:t>們若是與基督同死，脫離了世上的小學，為什麼仍像在世俗中活著、服從那「不可拿、不可嘗、不可摸」等類的規條呢？</a:t>
+              <a:t>你們若是與基督同死，脫離了世上的小學，為什麼仍像在世俗中活著、服從那「不可拿、不可嘗、不可摸」等類的規條呢？</a:t>
             </a:r>
             <a:r>
               <a:rPr lang="en-US" altLang="zh-TW" sz="6400" dirty="0">
@@ -3973,24 +3883,14 @@
           <a:lstStyle/>
           <a:p>
             <a:r>
-              <a:rPr lang="zh-TW" altLang="en-US" sz="6400" b="1" dirty="0" smtClean="0">
+              <a:rPr lang="zh-TW" altLang="en-US" sz="6400" b="1" dirty="0">
                 <a:solidFill>
                   <a:srgbClr val="660033"/>
                 </a:solidFill>
                 <a:latin typeface="微軟正黑體" pitchFamily="34" charset="-120"/>
                 <a:ea typeface="微軟正黑體" pitchFamily="34" charset="-120"/>
               </a:rPr>
-              <a:t>這</a:t>
-            </a:r>
-            <a:r>
-              <a:rPr lang="zh-TW" altLang="en-US" sz="6400" b="1" dirty="0">
-                <a:solidFill>
-                  <a:srgbClr val="660033"/>
-                </a:solidFill>
-                <a:latin typeface="微軟正黑體" pitchFamily="34" charset="-120"/>
-                <a:ea typeface="微軟正黑體" pitchFamily="34" charset="-120"/>
-              </a:rPr>
-              <a:t>都是照人所吩咐、所教導的。說到這一切，正用的時候就都敗壞了。</a:t>
+              <a:t>這都是照人所吩咐、所教導的。說到這一切，正用的時候就都敗壞了。</a:t>
             </a:r>
             <a:r>
               <a:rPr lang="en-US" altLang="zh-TW" sz="6400" b="1" dirty="0">
@@ -4058,24 +3958,14 @@
           <a:lstStyle/>
           <a:p>
             <a:r>
-              <a:rPr lang="zh-TW" altLang="en-US" sz="6400" dirty="0" smtClean="0">
+              <a:rPr lang="zh-TW" altLang="en-US" sz="6400" dirty="0">
                 <a:solidFill>
                   <a:srgbClr val="660033"/>
                 </a:solidFill>
                 <a:latin typeface="微軟正黑體" pitchFamily="34" charset="-120"/>
                 <a:ea typeface="微軟正黑體" pitchFamily="34" charset="-120"/>
               </a:rPr>
-              <a:t>這</a:t>
-            </a:r>
-            <a:r>
-              <a:rPr lang="zh-TW" altLang="en-US" sz="6400" dirty="0">
-                <a:solidFill>
-                  <a:srgbClr val="660033"/>
-                </a:solidFill>
-                <a:latin typeface="微軟正黑體" pitchFamily="34" charset="-120"/>
-                <a:ea typeface="微軟正黑體" pitchFamily="34" charset="-120"/>
-              </a:rPr>
-              <a:t>些規條使人徒有智慧之名，用私意崇拜，自表謙卑，苦待己身，其實在克制肉體的情慾上是毫無功效。</a:t>
+              <a:t>這些規條使人徒有智慧之名，用私意崇拜，自表謙卑，苦待己身，其實在克制肉體的情慾上是毫無功效。</a:t>
             </a:r>
             <a:endParaRPr lang="en-US" altLang="zh-TW" sz="6400" dirty="0">
               <a:solidFill>
@@ -4147,29 +4037,9 @@
                 <a:latin typeface="微軟正黑體" pitchFamily="34" charset="-120"/>
                 <a:ea typeface="微軟正黑體" pitchFamily="34" charset="-120"/>
               </a:rPr>
-              <a:t>所</a:t>
-            </a:r>
-            <a:r>
-              <a:rPr lang="zh-TW" altLang="en-US" sz="6400" b="1" dirty="0">
-                <a:solidFill>
-                  <a:srgbClr val="660033"/>
-                </a:solidFill>
-                <a:latin typeface="微軟正黑體" pitchFamily="34" charset="-120"/>
-                <a:ea typeface="微軟正黑體" pitchFamily="34" charset="-120"/>
-              </a:rPr>
-              <a:t>以，你們若真與基督一同復活，就當求在上面的事；那裡有基督坐在神的右邊</a:t>
-            </a:r>
-            <a:r>
-              <a:rPr lang="zh-TW" altLang="en-US" sz="6400" b="1" dirty="0" smtClean="0">
-                <a:solidFill>
-                  <a:srgbClr val="660033"/>
-                </a:solidFill>
-                <a:latin typeface="微軟正黑體" pitchFamily="34" charset="-120"/>
-                <a:ea typeface="微軟正黑體" pitchFamily="34" charset="-120"/>
-              </a:rPr>
-              <a:t>。</a:t>
-            </a:r>
-            <a:endParaRPr lang="en-US" altLang="zh-TW" sz="6400" b="1" dirty="0" smtClean="0">
+              <a:t>所以，你們若真與基督一同復活，就當求在上面的事；那裡有基督坐在神的右邊。</a:t>
+            </a:r>
+            <a:endParaRPr lang="en-US" altLang="zh-TW" sz="6400" b="1" dirty="0">
               <a:solidFill>
                 <a:srgbClr val="660033"/>
               </a:solidFill>
@@ -4179,52 +4049,25 @@
           </a:p>
           <a:p>
             <a:r>
-              <a:rPr lang="zh-TW" altLang="en-US" sz="6400" dirty="0" smtClean="0">
+              <a:rPr lang="zh-TW" altLang="en-US" sz="6400" dirty="0">
                 <a:solidFill>
                   <a:srgbClr val="660033"/>
                 </a:solidFill>
                 <a:latin typeface="微軟正黑體" pitchFamily="34" charset="-120"/>
                 <a:ea typeface="微軟正黑體" pitchFamily="34" charset="-120"/>
               </a:rPr>
-              <a:t>你</a:t>
-            </a:r>
-            <a:r>
-              <a:rPr lang="zh-TW" altLang="en-US" sz="6400" dirty="0">
+              <a:t>你們要思念上面的事，不要思念地上的事。</a:t>
+            </a:r>
+            <a:r>
+              <a:rPr lang="en-US" altLang="zh-TW" sz="6400" dirty="0">
                 <a:solidFill>
                   <a:srgbClr val="660033"/>
                 </a:solidFill>
                 <a:latin typeface="微軟正黑體" pitchFamily="34" charset="-120"/>
                 <a:ea typeface="微軟正黑體" pitchFamily="34" charset="-120"/>
               </a:rPr>
-              <a:t>們要思念上面的事，不要思念地上的事。</a:t>
-            </a:r>
-            <a:r>
-              <a:rPr lang="en-US" altLang="zh-TW" sz="6400" dirty="0">
-                <a:solidFill>
-                  <a:srgbClr val="660033"/>
-                </a:solidFill>
-                <a:latin typeface="微軟正黑體" pitchFamily="34" charset="-120"/>
-                <a:ea typeface="微軟正黑體" pitchFamily="34" charset="-120"/>
-              </a:rPr>
-              <a:t> </a:t>
-            </a:r>
-            <a:r>
-              <a:rPr lang="en-US" altLang="zh-TW" sz="6400" dirty="0">
-                <a:solidFill>
-                  <a:srgbClr val="660033"/>
-                </a:solidFill>
-                <a:latin typeface="微軟正黑體" pitchFamily="34" charset="-120"/>
-                <a:ea typeface="微軟正黑體" pitchFamily="34" charset="-120"/>
-              </a:rPr>
-              <a:t> </a:t>
-            </a:r>
-            <a:endParaRPr lang="en-US" altLang="zh-TW" sz="6400" dirty="0">
-              <a:solidFill>
-                <a:srgbClr val="660033"/>
-              </a:solidFill>
-              <a:latin typeface="微軟正黑體" pitchFamily="34" charset="-120"/>
-              <a:ea typeface="微軟正黑體" pitchFamily="34" charset="-120"/>
-            </a:endParaRPr>
+              <a:t>  </a:t>
+            </a:r>
           </a:p>
         </p:txBody>
       </p:sp>
@@ -4288,17 +4131,7 @@
                 <a:latin typeface="微軟正黑體" pitchFamily="34" charset="-120"/>
                 <a:ea typeface="微軟正黑體" pitchFamily="34" charset="-120"/>
               </a:rPr>
-              <a:t>因</a:t>
-            </a:r>
-            <a:r>
-              <a:rPr lang="zh-TW" altLang="en-US" sz="6400" b="1" dirty="0">
-                <a:solidFill>
-                  <a:srgbClr val="660033"/>
-                </a:solidFill>
-                <a:latin typeface="微軟正黑體" pitchFamily="34" charset="-120"/>
-                <a:ea typeface="微軟正黑體" pitchFamily="34" charset="-120"/>
-              </a:rPr>
-              <a:t>為你們已經死了，你們的生命與基督一同藏在神裡面。</a:t>
+              <a:t>因為你們已經死了，你們的生命與基督一同藏在神裡面。</a:t>
             </a:r>
             <a:endParaRPr lang="en-US" altLang="zh-TW" sz="6400" b="1" dirty="0">
               <a:solidFill>
@@ -4317,17 +4150,7 @@
                 <a:latin typeface="微軟正黑體" pitchFamily="34" charset="-120"/>
                 <a:ea typeface="微軟正黑體" pitchFamily="34" charset="-120"/>
               </a:rPr>
-              <a:t>基</a:t>
-            </a:r>
-            <a:r>
-              <a:rPr lang="zh-TW" altLang="en-US" sz="6400" dirty="0">
-                <a:solidFill>
-                  <a:srgbClr val="660033"/>
-                </a:solidFill>
-                <a:latin typeface="微軟正黑體" pitchFamily="34" charset="-120"/>
-                <a:ea typeface="微軟正黑體" pitchFamily="34" charset="-120"/>
-              </a:rPr>
-              <a:t>督是我們的生命，他顯現的時候，你們也要與他一同顯現在榮耀裡。</a:t>
+              <a:t>基督是我們的生命，祂顯現的時候，你們也要與他一同顯現在榮耀裡。</a:t>
             </a:r>
             <a:endParaRPr lang="en-US" altLang="zh-TW" sz="6400" dirty="0">
               <a:solidFill>
@@ -4392,24 +4215,14 @@
           <a:lstStyle/>
           <a:p>
             <a:r>
-              <a:rPr lang="zh-TW" altLang="en-US" sz="6400" b="1" dirty="0" smtClean="0">
+              <a:rPr lang="zh-TW" altLang="en-US" sz="6400" b="1" dirty="0">
                 <a:solidFill>
                   <a:srgbClr val="660033"/>
                 </a:solidFill>
                 <a:latin typeface="微軟正黑體" pitchFamily="34" charset="-120"/>
                 <a:ea typeface="微軟正黑體" pitchFamily="34" charset="-120"/>
               </a:rPr>
-              <a:t>所</a:t>
-            </a:r>
-            <a:r>
-              <a:rPr lang="zh-TW" altLang="en-US" sz="6400" b="1" dirty="0">
-                <a:solidFill>
-                  <a:srgbClr val="660033"/>
-                </a:solidFill>
-                <a:latin typeface="微軟正黑體" pitchFamily="34" charset="-120"/>
-                <a:ea typeface="微軟正黑體" pitchFamily="34" charset="-120"/>
-              </a:rPr>
-              <a:t>以，要治死你們在地上的肢體，就如淫亂、污穢、邪情、惡慾，和貪婪。</a:t>
+              <a:t>所以，要治死你們在地上的肢體，就如淫亂、污穢、邪情、惡慾，和貪婪。</a:t>
             </a:r>
             <a:r>
               <a:rPr lang="en-US" altLang="zh-TW" sz="6400" b="1" dirty="0">
@@ -4424,24 +4237,14 @@
           </a:p>
           <a:p>
             <a:r>
-              <a:rPr lang="zh-TW" altLang="en-US" sz="6400" dirty="0" smtClean="0">
+              <a:rPr lang="zh-TW" altLang="en-US" sz="6400" dirty="0">
                 <a:solidFill>
                   <a:srgbClr val="660033"/>
                 </a:solidFill>
                 <a:latin typeface="微軟正黑體" pitchFamily="34" charset="-120"/>
                 <a:ea typeface="微軟正黑體" pitchFamily="34" charset="-120"/>
               </a:rPr>
-              <a:t>因</a:t>
-            </a:r>
-            <a:r>
-              <a:rPr lang="zh-TW" altLang="en-US" sz="6400" dirty="0">
-                <a:solidFill>
-                  <a:srgbClr val="660033"/>
-                </a:solidFill>
-                <a:latin typeface="微軟正黑體" pitchFamily="34" charset="-120"/>
-                <a:ea typeface="微軟正黑體" pitchFamily="34" charset="-120"/>
-              </a:rPr>
-              <a:t>這些事，神的忿怒必臨到那悖逆之子。</a:t>
+              <a:t>因這些事，神的忿怒必臨到那悖逆之子。</a:t>
             </a:r>
             <a:endParaRPr lang="en-US" altLang="zh-TW" sz="6400" dirty="0">
               <a:solidFill>
@@ -4506,34 +4309,14 @@
           <a:lstStyle/>
           <a:p>
             <a:r>
-              <a:rPr lang="zh-TW" altLang="en-US" sz="6400" b="1" dirty="0" smtClean="0">
+              <a:rPr lang="zh-TW" altLang="en-US" sz="6400" b="1" dirty="0">
                 <a:solidFill>
                   <a:srgbClr val="660033"/>
                 </a:solidFill>
                 <a:latin typeface="微軟正黑體" pitchFamily="34" charset="-120"/>
                 <a:ea typeface="微軟正黑體" pitchFamily="34" charset="-120"/>
               </a:rPr>
-              <a:t>當</a:t>
-            </a:r>
-            <a:r>
-              <a:rPr lang="zh-TW" altLang="en-US" sz="6400" b="1" dirty="0">
-                <a:solidFill>
-                  <a:srgbClr val="660033"/>
-                </a:solidFill>
-                <a:latin typeface="微軟正黑體" pitchFamily="34" charset="-120"/>
-                <a:ea typeface="微軟正黑體" pitchFamily="34" charset="-120"/>
-              </a:rPr>
-              <a:t>你們在這些事中活著的時候，也曾這樣行過</a:t>
-            </a:r>
-            <a:r>
-              <a:rPr lang="zh-TW" altLang="en-US" sz="6400" b="1" dirty="0">
-                <a:solidFill>
-                  <a:srgbClr val="660033"/>
-                </a:solidFill>
-                <a:latin typeface="微軟正黑體" pitchFamily="34" charset="-120"/>
-                <a:ea typeface="微軟正黑體" pitchFamily="34" charset="-120"/>
-              </a:rPr>
-              <a:t>。</a:t>
+              <a:t>當你們在這些事中活著的時候，也曾這樣行過。</a:t>
             </a:r>
             <a:endParaRPr lang="en-US" altLang="zh-TW" sz="6400" b="1" dirty="0">
               <a:solidFill>
@@ -4545,52 +4328,25 @@
           </a:p>
           <a:p>
             <a:r>
-              <a:rPr lang="zh-TW" altLang="en-US" sz="6400" dirty="0" smtClean="0">
+              <a:rPr lang="zh-TW" altLang="en-US" sz="6400" dirty="0">
                 <a:solidFill>
                   <a:srgbClr val="660033"/>
                 </a:solidFill>
                 <a:latin typeface="微軟正黑體" pitchFamily="34" charset="-120"/>
                 <a:ea typeface="微軟正黑體" pitchFamily="34" charset="-120"/>
               </a:rPr>
-              <a:t>但</a:t>
-            </a:r>
-            <a:r>
-              <a:rPr lang="zh-TW" altLang="en-US" sz="6400" dirty="0">
+              <a:t>但現在你們要棄絕這一切的事，以及惱恨、忿怒、惡毒、毀謗，並口中污穢的言語。</a:t>
+            </a:r>
+            <a:r>
+              <a:rPr lang="en-US" altLang="zh-TW" sz="6400" dirty="0">
                 <a:solidFill>
                   <a:srgbClr val="660033"/>
                 </a:solidFill>
                 <a:latin typeface="微軟正黑體" pitchFamily="34" charset="-120"/>
                 <a:ea typeface="微軟正黑體" pitchFamily="34" charset="-120"/>
               </a:rPr>
-              <a:t>現在你們要棄絕這一切的事，以及惱恨、忿怒、惡毒、毀謗，並口中污穢的言語。</a:t>
-            </a:r>
-            <a:r>
-              <a:rPr lang="en-US" altLang="zh-TW" sz="6400" dirty="0">
-                <a:solidFill>
-                  <a:srgbClr val="660033"/>
-                </a:solidFill>
-                <a:latin typeface="微軟正黑體" pitchFamily="34" charset="-120"/>
-                <a:ea typeface="微軟正黑體" pitchFamily="34" charset="-120"/>
-              </a:rPr>
-              <a:t> </a:t>
-            </a:r>
-            <a:r>
-              <a:rPr lang="en-US" altLang="zh-TW" sz="6400" dirty="0">
-                <a:solidFill>
-                  <a:srgbClr val="660033"/>
-                </a:solidFill>
-                <a:latin typeface="微軟正黑體" pitchFamily="34" charset="-120"/>
-                <a:ea typeface="微軟正黑體" pitchFamily="34" charset="-120"/>
-              </a:rPr>
-              <a:t>  </a:t>
-            </a:r>
-            <a:endParaRPr lang="en-US" altLang="zh-TW" sz="6400" dirty="0">
-              <a:solidFill>
-                <a:srgbClr val="660033"/>
-              </a:solidFill>
-              <a:latin typeface="微軟正黑體" pitchFamily="34" charset="-120"/>
-              <a:ea typeface="微軟正黑體" pitchFamily="34" charset="-120"/>
-            </a:endParaRPr>
+              <a:t>   </a:t>
+            </a:r>
           </a:p>
         </p:txBody>
       </p:sp>
@@ -4647,34 +4403,14 @@
           <a:lstStyle/>
           <a:p>
             <a:r>
-              <a:rPr lang="zh-TW" altLang="en-US" sz="6400" b="1" dirty="0" smtClean="0">
+              <a:rPr lang="zh-TW" altLang="en-US" sz="6400" b="1" dirty="0">
                 <a:solidFill>
                   <a:srgbClr val="660033"/>
                 </a:solidFill>
                 <a:latin typeface="微軟正黑體" pitchFamily="34" charset="-120"/>
                 <a:ea typeface="微軟正黑體" pitchFamily="34" charset="-120"/>
               </a:rPr>
-              <a:t>不</a:t>
-            </a:r>
-            <a:r>
-              <a:rPr lang="zh-TW" altLang="en-US" sz="6400" b="1" dirty="0">
-                <a:solidFill>
-                  <a:srgbClr val="660033"/>
-                </a:solidFill>
-                <a:latin typeface="微軟正黑體" pitchFamily="34" charset="-120"/>
-                <a:ea typeface="微軟正黑體" pitchFamily="34" charset="-120"/>
-              </a:rPr>
-              <a:t>要彼此說謊；因你們已經脫去舊人和舊人的行為</a:t>
-            </a:r>
-            <a:r>
-              <a:rPr lang="zh-TW" altLang="en-US" sz="6400" b="1" dirty="0">
-                <a:solidFill>
-                  <a:srgbClr val="660033"/>
-                </a:solidFill>
-                <a:latin typeface="微軟正黑體" pitchFamily="34" charset="-120"/>
-                <a:ea typeface="微軟正黑體" pitchFamily="34" charset="-120"/>
-              </a:rPr>
-              <a:t>，</a:t>
+              <a:t>不要彼此說謊；因你們已經脫去舊人和舊人的行為，</a:t>
             </a:r>
             <a:endParaRPr lang="en-US" altLang="zh-TW" sz="6400" b="1" dirty="0">
               <a:solidFill>
@@ -4686,52 +4422,25 @@
           </a:p>
           <a:p>
             <a:r>
-              <a:rPr lang="zh-TW" altLang="en-US" sz="6400" dirty="0" smtClean="0">
+              <a:rPr lang="zh-TW" altLang="en-US" sz="6400" dirty="0">
                 <a:solidFill>
                   <a:srgbClr val="660033"/>
                 </a:solidFill>
                 <a:latin typeface="微軟正黑體" pitchFamily="34" charset="-120"/>
                 <a:ea typeface="微軟正黑體" pitchFamily="34" charset="-120"/>
               </a:rPr>
-              <a:t>穿</a:t>
-            </a:r>
-            <a:r>
-              <a:rPr lang="zh-TW" altLang="en-US" sz="6400" dirty="0">
+              <a:t>穿上了新人。這新人在知識上漸漸更新，正如造他主的形像。</a:t>
+            </a:r>
+            <a:r>
+              <a:rPr lang="en-US" altLang="zh-TW" sz="6400" dirty="0">
                 <a:solidFill>
                   <a:srgbClr val="660033"/>
                 </a:solidFill>
                 <a:latin typeface="微軟正黑體" pitchFamily="34" charset="-120"/>
                 <a:ea typeface="微軟正黑體" pitchFamily="34" charset="-120"/>
               </a:rPr>
-              <a:t>上了新人。這新人在知識上漸漸更新，正如造他主的形像。</a:t>
-            </a:r>
-            <a:r>
-              <a:rPr lang="en-US" altLang="zh-TW" sz="6400" dirty="0">
-                <a:solidFill>
-                  <a:srgbClr val="660033"/>
-                </a:solidFill>
-                <a:latin typeface="微軟正黑體" pitchFamily="34" charset="-120"/>
-                <a:ea typeface="微軟正黑體" pitchFamily="34" charset="-120"/>
-              </a:rPr>
-              <a:t> </a:t>
-            </a:r>
-            <a:r>
-              <a:rPr lang="en-US" altLang="zh-TW" sz="6400" dirty="0">
-                <a:solidFill>
-                  <a:srgbClr val="660033"/>
-                </a:solidFill>
-                <a:latin typeface="微軟正黑體" pitchFamily="34" charset="-120"/>
-                <a:ea typeface="微軟正黑體" pitchFamily="34" charset="-120"/>
-              </a:rPr>
-              <a:t> </a:t>
-            </a:r>
-            <a:endParaRPr lang="en-US" altLang="zh-TW" sz="6400" dirty="0">
-              <a:solidFill>
-                <a:srgbClr val="660033"/>
-              </a:solidFill>
-              <a:latin typeface="微軟正黑體" pitchFamily="34" charset="-120"/>
-              <a:ea typeface="微軟正黑體" pitchFamily="34" charset="-120"/>
-            </a:endParaRPr>
+              <a:t>  </a:t>
+            </a:r>
           </a:p>
         </p:txBody>
       </p:sp>
